--- a/clientes/flavia-muccelin/Cultura-de-Marca-Forma.pptx
+++ b/clientes/flavia-muccelin/Cultura-de-Marca-Forma.pptx
@@ -5766,7 +5766,7 @@
                 </a:solidFill>
                 <a:latin typeface="Outfit 1 Light"/>
               </a:rPr>
-              <a:t>O que o mercado reconhece e o que precisamos fortalecer.</a:t>
+              <a:t>O que o mercado reconhece e o que precisa ser fortalecido.</a:t>
             </a:r>
           </a:p>
         </p:txBody>
@@ -5925,7 +5925,7 @@
         </p:nvSpPr>
         <p:spPr>
           <a:xfrm>
-            <a:off x="2011680" y="2282281"/>
+            <a:off x="2011680" y="2659288"/>
             <a:ext cx="14264640" cy="882396"/>
           </a:xfrm>
           <a:prstGeom prst="rect">
@@ -5951,7 +5951,7 @@
                 </a:solidFill>
                 <a:latin typeface="Outfit 1 Light"/>
               </a:rPr>
-              <a:t>NOSSO VALOR NÃO ESTÁ APENAS NO QUE PRODUZIMOS. ESTÁ NA CONFIANÇA QUE CONSTRUÍMOS.</a:t>
+              <a:t>O VALOR DA FORMA NÃO ESTÁ APENAS NO QUE ELA PRODUZ. ESTÁ NA CONFIANÇA QUE ELA CONSTRÓI.</a:t>
             </a:r>
           </a:p>
         </p:txBody>
@@ -5964,7 +5964,7 @@
         </p:nvSpPr>
         <p:spPr>
           <a:xfrm>
-            <a:off x="2011680" y="4727204"/>
+            <a:off x="2011680" y="4350196"/>
             <a:ext cx="14264640" cy="10973"/>
           </a:xfrm>
           <a:prstGeom prst="rect">
@@ -6008,7 +6008,7 @@
         </p:nvSpPr>
         <p:spPr>
           <a:xfrm>
-            <a:off x="2011680" y="5074676"/>
+            <a:off x="2011680" y="4697668"/>
             <a:ext cx="6880860" cy="10973"/>
           </a:xfrm>
           <a:prstGeom prst="rect">
@@ -6052,7 +6052,7 @@
         </p:nvSpPr>
         <p:spPr>
           <a:xfrm>
-            <a:off x="2011680" y="5330708"/>
+            <a:off x="2011680" y="4953700"/>
             <a:ext cx="6880860" cy="526085"/>
           </a:xfrm>
           <a:prstGeom prst="rect">
@@ -6091,7 +6091,7 @@
         </p:nvSpPr>
         <p:spPr>
           <a:xfrm>
-            <a:off x="2011680" y="6021385"/>
+            <a:off x="2011680" y="5644377"/>
             <a:ext cx="6880860" cy="1480414"/>
           </a:xfrm>
           <a:prstGeom prst="rect">
@@ -6130,7 +6130,7 @@
         </p:nvSpPr>
         <p:spPr>
           <a:xfrm>
-            <a:off x="9395460" y="5074676"/>
+            <a:off x="9395460" y="4697668"/>
             <a:ext cx="6880860" cy="10973"/>
           </a:xfrm>
           <a:prstGeom prst="rect">
@@ -6174,7 +6174,7 @@
         </p:nvSpPr>
         <p:spPr>
           <a:xfrm>
-            <a:off x="9395460" y="5330708"/>
+            <a:off x="9395460" y="4953700"/>
             <a:ext cx="6880860" cy="526085"/>
           </a:xfrm>
           <a:prstGeom prst="rect">
@@ -6200,7 +6200,7 @@
                 </a:solidFill>
                 <a:latin typeface="Outfit 1 Light"/>
               </a:rPr>
-              <a:t>O que precisamos preservar</a:t>
+              <a:t>O que precisa ser preservado</a:t>
             </a:r>
           </a:p>
         </p:txBody>
@@ -6213,7 +6213,7 @@
         </p:nvSpPr>
         <p:spPr>
           <a:xfrm>
-            <a:off x="9395460" y="6021385"/>
+            <a:off x="9395460" y="5644377"/>
             <a:ext cx="6880860" cy="1480414"/>
           </a:xfrm>
           <a:prstGeom prst="rect">
@@ -9128,7 +9128,7 @@
                 </a:solidFill>
                 <a:latin typeface="Outfit 1 Light"/>
               </a:rPr>
-              <a:t>O que o mercado reconhece e o que precisamos fortalecer.</a:t>
+              <a:t>O que o mercado reconhece e o que precisa ser fortalecido.</a:t>
             </a:r>
           </a:p>
         </p:txBody>
